--- a/content/partner/crossroads-partner-brief-nic.pptx
+++ b/content/partner/crossroads-partner-brief-nic.pptx
@@ -5188,7 +5188,7 @@
                 <a:ea typeface="Calibri" pitchFamily="34" charset="-122"/>
                 <a:cs typeface="Calibri" pitchFamily="34" charset="-120"/>
               </a:rPr>
-              <a:t>Flat-rate site, date requests, deposits, confirmation emails. Live today at crossroadsweddingco.com.</a:t>
+              <a:t>Flat-rate site, date requests, deposits, confirmation emails. Live today at crossroadsweddingco.shop.</a:t>
             </a:r>
             <a:endParaRPr lang="en-US" sz="1200" dirty="0"/>
           </a:p>
@@ -6809,7 +6809,7 @@
                 <a:ea typeface="Calibri" pitchFamily="34" charset="-122"/>
                 <a:cs typeface="Calibri" pitchFamily="34" charset="-120"/>
               </a:rPr>
-              <a:t>Jacob Kennedy · jake@crossroadsweddingco.com · crossroadsweddingco.com</a:t>
+              <a:t>Jacob Kennedy · jake@crossroadsweddingco.shop · crossroadsweddingco.shop</a:t>
             </a:r>
             <a:endParaRPr lang="en-US" sz="1200" dirty="0"/>
           </a:p>
